--- a/Presentation1.pptx
+++ b/Presentation1.pptx
@@ -104,6 +104,11 @@
       </a:defRPr>
     </a:lvl9pPr>
   </p:defaultTextStyle>
+  <p:extLst>
+    <p:ext uri="{EFAFB233-063F-42B5-8137-9DF3F51BA10A}">
+      <p15:sldGuideLst xmlns:p15="http://schemas.microsoft.com/office/powerpoint/2012/main"/>
+    </p:ext>
+  </p:extLst>
 </p:presentation>
 </file>
 
@@ -238,7 +243,7 @@
           <a:p>
             <a:fld id="{5E971BC9-BF81-45DC-83D5-BB69DE6630E1}" type="datetimeFigureOut">
               <a:rPr lang="en-US" smtClean="0"/>
-              <a:t>11/13/2022</a:t>
+              <a:t>11/14/2022</a:t>
             </a:fld>
             <a:endParaRPr lang="en-US"/>
           </a:p>
@@ -408,7 +413,7 @@
           <a:p>
             <a:fld id="{5E971BC9-BF81-45DC-83D5-BB69DE6630E1}" type="datetimeFigureOut">
               <a:rPr lang="en-US" smtClean="0"/>
-              <a:t>11/13/2022</a:t>
+              <a:t>11/14/2022</a:t>
             </a:fld>
             <a:endParaRPr lang="en-US"/>
           </a:p>
@@ -588,7 +593,7 @@
           <a:p>
             <a:fld id="{5E971BC9-BF81-45DC-83D5-BB69DE6630E1}" type="datetimeFigureOut">
               <a:rPr lang="en-US" smtClean="0"/>
-              <a:t>11/13/2022</a:t>
+              <a:t>11/14/2022</a:t>
             </a:fld>
             <a:endParaRPr lang="en-US"/>
           </a:p>
@@ -758,7 +763,7 @@
           <a:p>
             <a:fld id="{5E971BC9-BF81-45DC-83D5-BB69DE6630E1}" type="datetimeFigureOut">
               <a:rPr lang="en-US" smtClean="0"/>
-              <a:t>11/13/2022</a:t>
+              <a:t>11/14/2022</a:t>
             </a:fld>
             <a:endParaRPr lang="en-US"/>
           </a:p>
@@ -1004,7 +1009,7 @@
           <a:p>
             <a:fld id="{5E971BC9-BF81-45DC-83D5-BB69DE6630E1}" type="datetimeFigureOut">
               <a:rPr lang="en-US" smtClean="0"/>
-              <a:t>11/13/2022</a:t>
+              <a:t>11/14/2022</a:t>
             </a:fld>
             <a:endParaRPr lang="en-US"/>
           </a:p>
@@ -1236,7 +1241,7 @@
           <a:p>
             <a:fld id="{5E971BC9-BF81-45DC-83D5-BB69DE6630E1}" type="datetimeFigureOut">
               <a:rPr lang="en-US" smtClean="0"/>
-              <a:t>11/13/2022</a:t>
+              <a:t>11/14/2022</a:t>
             </a:fld>
             <a:endParaRPr lang="en-US"/>
           </a:p>
@@ -1603,7 +1608,7 @@
           <a:p>
             <a:fld id="{5E971BC9-BF81-45DC-83D5-BB69DE6630E1}" type="datetimeFigureOut">
               <a:rPr lang="en-US" smtClean="0"/>
-              <a:t>11/13/2022</a:t>
+              <a:t>11/14/2022</a:t>
             </a:fld>
             <a:endParaRPr lang="en-US"/>
           </a:p>
@@ -1721,7 +1726,7 @@
           <a:p>
             <a:fld id="{5E971BC9-BF81-45DC-83D5-BB69DE6630E1}" type="datetimeFigureOut">
               <a:rPr lang="en-US" smtClean="0"/>
-              <a:t>11/13/2022</a:t>
+              <a:t>11/14/2022</a:t>
             </a:fld>
             <a:endParaRPr lang="en-US"/>
           </a:p>
@@ -1816,7 +1821,7 @@
           <a:p>
             <a:fld id="{5E971BC9-BF81-45DC-83D5-BB69DE6630E1}" type="datetimeFigureOut">
               <a:rPr lang="en-US" smtClean="0"/>
-              <a:t>11/13/2022</a:t>
+              <a:t>11/14/2022</a:t>
             </a:fld>
             <a:endParaRPr lang="en-US"/>
           </a:p>
@@ -2093,7 +2098,7 @@
           <a:p>
             <a:fld id="{5E971BC9-BF81-45DC-83D5-BB69DE6630E1}" type="datetimeFigureOut">
               <a:rPr lang="en-US" smtClean="0"/>
-              <a:t>11/13/2022</a:t>
+              <a:t>11/14/2022</a:t>
             </a:fld>
             <a:endParaRPr lang="en-US"/>
           </a:p>
@@ -2346,7 +2351,7 @@
           <a:p>
             <a:fld id="{5E971BC9-BF81-45DC-83D5-BB69DE6630E1}" type="datetimeFigureOut">
               <a:rPr lang="en-US" smtClean="0"/>
-              <a:t>11/13/2022</a:t>
+              <a:t>11/14/2022</a:t>
             </a:fld>
             <a:endParaRPr lang="en-US"/>
           </a:p>
@@ -2559,7 +2564,7 @@
           <a:p>
             <a:fld id="{5E971BC9-BF81-45DC-83D5-BB69DE6630E1}" type="datetimeFigureOut">
               <a:rPr lang="en-US" smtClean="0"/>
-              <a:t>11/13/2022</a:t>
+              <a:t>11/14/2022</a:t>
             </a:fld>
             <a:endParaRPr lang="en-US"/>
           </a:p>
@@ -2972,7 +2977,7 @@
         </p:nvGrpSpPr>
         <p:grpSpPr>
           <a:xfrm>
-            <a:off x="549659" y="756755"/>
+            <a:off x="549659" y="684185"/>
             <a:ext cx="1295245" cy="1439991"/>
             <a:chOff x="1351394" y="2755232"/>
             <a:chExt cx="1387641" cy="1542712"/>
@@ -3053,7 +3058,7 @@
         </p:nvGrpSpPr>
         <p:grpSpPr>
           <a:xfrm>
-            <a:off x="8831179" y="63507"/>
+            <a:off x="4811584" y="4946035"/>
             <a:ext cx="1997243" cy="1815998"/>
             <a:chOff x="7784431" y="413083"/>
             <a:chExt cx="1997243" cy="1815998"/>
@@ -3193,8 +3198,8 @@
           </p:nvSpPr>
           <p:spPr>
             <a:xfrm>
-              <a:off x="5486399" y="2533023"/>
-              <a:ext cx="2189747" cy="338554"/>
+              <a:off x="5166245" y="2530741"/>
+              <a:ext cx="2644472" cy="338554"/>
             </a:xfrm>
             <a:prstGeom prst="rect">
               <a:avLst/>
@@ -3215,7 +3220,27 @@
                   <a:latin typeface="Poppins" panose="00000500000000000000" pitchFamily="2" charset="0"/>
                   <a:cs typeface="Poppins" panose="00000500000000000000" pitchFamily="2" charset="0"/>
                 </a:rPr>
-                <a:t>Mobile Application</a:t>
+                <a:t>“</a:t>
+              </a:r>
+              <a:r>
+                <a:rPr lang="en-US" sz="1600" dirty="0" err="1" smtClean="0">
+                  <a:solidFill>
+                    <a:schemeClr val="bg1"/>
+                  </a:solidFill>
+                  <a:latin typeface="Poppins" panose="00000500000000000000" pitchFamily="2" charset="0"/>
+                  <a:cs typeface="Poppins" panose="00000500000000000000" pitchFamily="2" charset="0"/>
+                </a:rPr>
+                <a:t>BarkMeow</a:t>
+              </a:r>
+              <a:r>
+                <a:rPr lang="en-US" sz="1600" dirty="0" smtClean="0">
+                  <a:solidFill>
+                    <a:schemeClr val="bg1"/>
+                  </a:solidFill>
+                  <a:latin typeface="Poppins" panose="00000500000000000000" pitchFamily="2" charset="0"/>
+                  <a:cs typeface="Poppins" panose="00000500000000000000" pitchFamily="2" charset="0"/>
+                </a:rPr>
+                <a:t>” Application</a:t>
               </a:r>
               <a:endParaRPr lang="en-US" sz="1600" dirty="0">
                 <a:solidFill>
@@ -3236,7 +3261,7 @@
         </p:nvGrpSpPr>
         <p:grpSpPr>
           <a:xfrm>
-            <a:off x="395940" y="2143685"/>
+            <a:off x="395940" y="2071115"/>
             <a:ext cx="1528464" cy="1599250"/>
             <a:chOff x="288304" y="2000599"/>
             <a:chExt cx="1528464" cy="1599250"/>
@@ -3299,7 +3324,14 @@
                   <a:latin typeface="Poppins" panose="00000500000000000000" pitchFamily="2" charset="0"/>
                   <a:cs typeface="Poppins" panose="00000500000000000000" pitchFamily="2" charset="0"/>
                 </a:rPr>
-                <a:t>Pet day care</a:t>
+                <a:t>Pet </a:t>
+              </a:r>
+              <a:r>
+                <a:rPr lang="en-US" sz="1400" dirty="0" smtClean="0">
+                  <a:latin typeface="Poppins" panose="00000500000000000000" pitchFamily="2" charset="0"/>
+                  <a:cs typeface="Poppins" panose="00000500000000000000" pitchFamily="2" charset="0"/>
+                </a:rPr>
+                <a:t>day-care</a:t>
               </a:r>
               <a:endParaRPr lang="en-US" sz="1400" dirty="0">
                 <a:latin typeface="Poppins" panose="00000500000000000000" pitchFamily="2" charset="0"/>
@@ -3317,7 +3349,7 @@
         </p:nvGrpSpPr>
         <p:grpSpPr>
           <a:xfrm>
-            <a:off x="502027" y="3706877"/>
+            <a:off x="502027" y="3648821"/>
             <a:ext cx="1415560" cy="1561796"/>
             <a:chOff x="360947" y="3917592"/>
             <a:chExt cx="1415560" cy="1561796"/>
@@ -3397,7 +3429,7 @@
         </p:nvGrpSpPr>
         <p:grpSpPr>
           <a:xfrm>
-            <a:off x="571869" y="5378955"/>
+            <a:off x="571869" y="5320899"/>
             <a:ext cx="1187119" cy="1452694"/>
             <a:chOff x="3070415" y="5325499"/>
             <a:chExt cx="1187119" cy="1452694"/>
@@ -3478,7 +3510,7 @@
         </p:nvGrpSpPr>
         <p:grpSpPr>
           <a:xfrm>
-            <a:off x="8686635" y="4364451"/>
+            <a:off x="8957368" y="4550624"/>
             <a:ext cx="2827751" cy="2057520"/>
             <a:chOff x="8686635" y="4364451"/>
             <a:chExt cx="2827751" cy="2057520"/>
@@ -3558,9 +3590,9 @@
           <p:nvPr/>
         </p:nvCxnSpPr>
         <p:spPr>
-          <a:xfrm flipH="1">
-            <a:off x="6924172" y="1365337"/>
-            <a:ext cx="1907008" cy="797881"/>
+          <a:xfrm flipV="1">
+            <a:off x="5800371" y="3140686"/>
+            <a:ext cx="1" cy="1820210"/>
           </a:xfrm>
           <a:prstGeom prst="straightConnector1">
             <a:avLst/>
@@ -3593,7 +3625,7 @@
         <p:spPr>
           <a:xfrm>
             <a:off x="251343" y="134365"/>
-            <a:ext cx="1891429" cy="6697284"/>
+            <a:ext cx="1891429" cy="6641085"/>
           </a:xfrm>
           <a:prstGeom prst="roundRect">
             <a:avLst/>
@@ -3664,15 +3696,13 @@
       <p:cxnSp>
         <p:nvCxnSpPr>
           <p:cNvPr id="43" name="Straight Arrow Connector 42"/>
-          <p:cNvCxnSpPr>
-            <a:stCxn id="11" idx="1"/>
-          </p:cNvCxnSpPr>
+          <p:cNvCxnSpPr/>
           <p:nvPr/>
         </p:nvCxnSpPr>
         <p:spPr>
           <a:xfrm flipH="1">
-            <a:off x="2138780" y="2682038"/>
-            <a:ext cx="1838232" cy="8674"/>
+            <a:off x="2142772" y="2450473"/>
+            <a:ext cx="1834241" cy="0"/>
           </a:xfrm>
           <a:prstGeom prst="straightConnector1">
             <a:avLst/>
@@ -3704,8 +3734,8 @@
         </p:nvSpPr>
         <p:spPr>
           <a:xfrm>
-            <a:off x="2671586" y="2382935"/>
-            <a:ext cx="1455821" cy="307777"/>
+            <a:off x="2613121" y="2142959"/>
+            <a:ext cx="942879" cy="307777"/>
           </a:xfrm>
           <a:prstGeom prst="rect">
             <a:avLst/>
@@ -3732,6 +3762,958 @@
           </a:p>
         </p:txBody>
       </p:sp>
+      <p:sp>
+        <p:nvSpPr>
+          <p:cNvPr id="31" name="TextBox 30"/>
+          <p:cNvSpPr txBox="1"/>
+          <p:nvPr/>
+        </p:nvSpPr>
+        <p:spPr>
+          <a:xfrm>
+            <a:off x="5801991" y="3923985"/>
+            <a:ext cx="1455821" cy="307777"/>
+          </a:xfrm>
+          <a:prstGeom prst="rect">
+            <a:avLst/>
+          </a:prstGeom>
+          <a:noFill/>
+        </p:spPr>
+        <p:txBody>
+          <a:bodyPr wrap="square" rtlCol="0">
+            <a:spAutoFit/>
+          </a:bodyPr>
+          <a:lstStyle/>
+          <a:p>
+            <a:r>
+              <a:rPr lang="en-US" sz="1400" dirty="0" smtClean="0">
+                <a:latin typeface="Poppins" panose="00000500000000000000" pitchFamily="2" charset="0"/>
+                <a:cs typeface="Poppins" panose="00000500000000000000" pitchFamily="2" charset="0"/>
+              </a:rPr>
+              <a:t>Interact </a:t>
+            </a:r>
+            <a:endParaRPr lang="en-US" sz="1400" dirty="0">
+              <a:latin typeface="Poppins" panose="00000500000000000000" pitchFamily="2" charset="0"/>
+              <a:cs typeface="Poppins" panose="00000500000000000000" pitchFamily="2" charset="0"/>
+            </a:endParaRPr>
+          </a:p>
+        </p:txBody>
+      </p:sp>
+      <p:cxnSp>
+        <p:nvCxnSpPr>
+          <p:cNvPr id="32" name="Straight Arrow Connector 31"/>
+          <p:cNvCxnSpPr>
+            <a:endCxn id="27" idx="1"/>
+          </p:cNvCxnSpPr>
+          <p:nvPr/>
+        </p:nvCxnSpPr>
+        <p:spPr>
+          <a:xfrm>
+            <a:off x="8272658" y="5493207"/>
+            <a:ext cx="684710" cy="1"/>
+          </a:xfrm>
+          <a:prstGeom prst="straightConnector1">
+            <a:avLst/>
+          </a:prstGeom>
+          <a:ln w="38100">
+            <a:tailEnd type="triangle"/>
+          </a:ln>
+        </p:spPr>
+        <p:style>
+          <a:lnRef idx="1">
+            <a:schemeClr val="accent1"/>
+          </a:lnRef>
+          <a:fillRef idx="0">
+            <a:schemeClr val="accent1"/>
+          </a:fillRef>
+          <a:effectRef idx="0">
+            <a:schemeClr val="accent1"/>
+          </a:effectRef>
+          <a:fontRef idx="minor">
+            <a:schemeClr val="tx1"/>
+          </a:fontRef>
+        </p:style>
+      </p:cxnSp>
+      <p:sp>
+        <p:nvSpPr>
+          <p:cNvPr id="36" name="TextBox 35"/>
+          <p:cNvSpPr txBox="1"/>
+          <p:nvPr/>
+        </p:nvSpPr>
+        <p:spPr>
+          <a:xfrm>
+            <a:off x="8291513" y="3539492"/>
+            <a:ext cx="1455821" cy="307777"/>
+          </a:xfrm>
+          <a:prstGeom prst="rect">
+            <a:avLst/>
+          </a:prstGeom>
+          <a:noFill/>
+        </p:spPr>
+        <p:txBody>
+          <a:bodyPr wrap="square" rtlCol="0">
+            <a:spAutoFit/>
+          </a:bodyPr>
+          <a:lstStyle/>
+          <a:p>
+            <a:r>
+              <a:rPr lang="en-US" sz="1400" dirty="0" smtClean="0">
+                <a:latin typeface="Poppins" panose="00000500000000000000" pitchFamily="2" charset="0"/>
+                <a:cs typeface="Poppins" panose="00000500000000000000" pitchFamily="2" charset="0"/>
+              </a:rPr>
+              <a:t>Connects</a:t>
+            </a:r>
+            <a:endParaRPr lang="en-US" sz="1400" dirty="0">
+              <a:latin typeface="Poppins" panose="00000500000000000000" pitchFamily="2" charset="0"/>
+              <a:cs typeface="Poppins" panose="00000500000000000000" pitchFamily="2" charset="0"/>
+            </a:endParaRPr>
+          </a:p>
+        </p:txBody>
+      </p:sp>
+      <p:grpSp>
+        <p:nvGrpSpPr>
+          <p:cNvPr id="38" name="Group 37"/>
+          <p:cNvGrpSpPr/>
+          <p:nvPr/>
+        </p:nvGrpSpPr>
+        <p:grpSpPr>
+          <a:xfrm>
+            <a:off x="7229863" y="160175"/>
+            <a:ext cx="2189908" cy="665180"/>
+            <a:chOff x="4957010" y="2234977"/>
+            <a:chExt cx="3019927" cy="917297"/>
+          </a:xfrm>
+        </p:grpSpPr>
+        <p:sp>
+          <p:nvSpPr>
+            <p:cNvPr id="41" name="Rounded Rectangle 40"/>
+            <p:cNvSpPr/>
+            <p:nvPr/>
+          </p:nvSpPr>
+          <p:spPr>
+            <a:xfrm>
+              <a:off x="4957010" y="2234977"/>
+              <a:ext cx="3019927" cy="917297"/>
+            </a:xfrm>
+            <a:prstGeom prst="roundRect">
+              <a:avLst>
+                <a:gd name="adj" fmla="val 10953"/>
+              </a:avLst>
+            </a:prstGeom>
+            <a:solidFill>
+              <a:srgbClr val="0070C0"/>
+            </a:solidFill>
+          </p:spPr>
+          <p:style>
+            <a:lnRef idx="2">
+              <a:schemeClr val="accent1">
+                <a:shade val="50000"/>
+              </a:schemeClr>
+            </a:lnRef>
+            <a:fillRef idx="1">
+              <a:schemeClr val="accent1"/>
+            </a:fillRef>
+            <a:effectRef idx="0">
+              <a:schemeClr val="accent1"/>
+            </a:effectRef>
+            <a:fontRef idx="minor">
+              <a:schemeClr val="lt1"/>
+            </a:fontRef>
+          </p:style>
+          <p:txBody>
+            <a:bodyPr rtlCol="0" anchor="ctr"/>
+            <a:lstStyle/>
+            <a:p>
+              <a:pPr algn="ctr"/>
+              <a:endParaRPr lang="en-US"/>
+            </a:p>
+          </p:txBody>
+        </p:sp>
+        <p:sp>
+          <p:nvSpPr>
+            <p:cNvPr id="44" name="TextBox 43"/>
+            <p:cNvSpPr txBox="1"/>
+            <p:nvPr/>
+          </p:nvSpPr>
+          <p:spPr>
+            <a:xfrm>
+              <a:off x="4995552" y="2390849"/>
+              <a:ext cx="2949984" cy="636646"/>
+            </a:xfrm>
+            <a:prstGeom prst="rect">
+              <a:avLst/>
+            </a:prstGeom>
+            <a:noFill/>
+          </p:spPr>
+          <p:txBody>
+            <a:bodyPr wrap="square" rtlCol="0">
+              <a:spAutoFit/>
+            </a:bodyPr>
+            <a:lstStyle/>
+            <a:p>
+              <a:pPr algn="ctr"/>
+              <a:r>
+                <a:rPr lang="en-US" sz="1200" dirty="0" smtClean="0">
+                  <a:solidFill>
+                    <a:schemeClr val="bg1"/>
+                  </a:solidFill>
+                  <a:latin typeface="Poppins" panose="00000500000000000000" pitchFamily="2" charset="0"/>
+                  <a:cs typeface="Poppins" panose="00000500000000000000" pitchFamily="2" charset="0"/>
+                </a:rPr>
+                <a:t>Keep all health records of the pet</a:t>
+              </a:r>
+              <a:endParaRPr lang="en-US" sz="1200" dirty="0">
+                <a:solidFill>
+                  <a:schemeClr val="bg1"/>
+                </a:solidFill>
+                <a:latin typeface="Poppins" panose="00000500000000000000" pitchFamily="2" charset="0"/>
+                <a:cs typeface="Poppins" panose="00000500000000000000" pitchFamily="2" charset="0"/>
+              </a:endParaRPr>
+            </a:p>
+          </p:txBody>
+        </p:sp>
+      </p:grpSp>
+      <p:cxnSp>
+        <p:nvCxnSpPr>
+          <p:cNvPr id="45" name="Straight Arrow Connector 44"/>
+          <p:cNvCxnSpPr/>
+          <p:nvPr/>
+        </p:nvCxnSpPr>
+        <p:spPr>
+          <a:xfrm flipV="1">
+            <a:off x="2142772" y="3003550"/>
+            <a:ext cx="1834240" cy="9525"/>
+          </a:xfrm>
+          <a:prstGeom prst="straightConnector1">
+            <a:avLst/>
+          </a:prstGeom>
+          <a:ln w="38100">
+            <a:tailEnd type="triangle"/>
+          </a:ln>
+        </p:spPr>
+        <p:style>
+          <a:lnRef idx="1">
+            <a:schemeClr val="accent1"/>
+          </a:lnRef>
+          <a:fillRef idx="0">
+            <a:schemeClr val="accent1"/>
+          </a:fillRef>
+          <a:effectRef idx="0">
+            <a:schemeClr val="accent1"/>
+          </a:effectRef>
+          <a:fontRef idx="minor">
+            <a:schemeClr val="tx1"/>
+          </a:fontRef>
+        </p:style>
+      </p:cxnSp>
+      <p:sp>
+        <p:nvSpPr>
+          <p:cNvPr id="50" name="TextBox 49"/>
+          <p:cNvSpPr txBox="1"/>
+          <p:nvPr/>
+        </p:nvSpPr>
+        <p:spPr>
+          <a:xfrm>
+            <a:off x="2215177" y="3016642"/>
+            <a:ext cx="1689642" cy="461665"/>
+          </a:xfrm>
+          <a:prstGeom prst="rect">
+            <a:avLst/>
+          </a:prstGeom>
+          <a:noFill/>
+        </p:spPr>
+        <p:txBody>
+          <a:bodyPr wrap="square" rtlCol="0">
+            <a:spAutoFit/>
+          </a:bodyPr>
+          <a:lstStyle/>
+          <a:p>
+            <a:pPr algn="ctr"/>
+            <a:r>
+              <a:rPr lang="en-US" sz="1200" dirty="0" smtClean="0">
+                <a:latin typeface="Poppins" panose="00000500000000000000" pitchFamily="2" charset="0"/>
+                <a:cs typeface="Poppins" panose="00000500000000000000" pitchFamily="2" charset="0"/>
+              </a:rPr>
+              <a:t>Create business accounts</a:t>
+            </a:r>
+            <a:endParaRPr lang="en-US" sz="1200" dirty="0">
+              <a:latin typeface="Poppins" panose="00000500000000000000" pitchFamily="2" charset="0"/>
+              <a:cs typeface="Poppins" panose="00000500000000000000" pitchFamily="2" charset="0"/>
+            </a:endParaRPr>
+          </a:p>
+        </p:txBody>
+      </p:sp>
+      <p:cxnSp>
+        <p:nvCxnSpPr>
+          <p:cNvPr id="52" name="Straight Connector 51"/>
+          <p:cNvCxnSpPr/>
+          <p:nvPr/>
+        </p:nvCxnSpPr>
+        <p:spPr>
+          <a:xfrm>
+            <a:off x="5809060" y="1455821"/>
+            <a:ext cx="1" cy="767568"/>
+          </a:xfrm>
+          <a:prstGeom prst="line">
+            <a:avLst/>
+          </a:prstGeom>
+          <a:ln w="38100"/>
+        </p:spPr>
+        <p:style>
+          <a:lnRef idx="1">
+            <a:schemeClr val="accent1"/>
+          </a:lnRef>
+          <a:fillRef idx="0">
+            <a:schemeClr val="accent1"/>
+          </a:fillRef>
+          <a:effectRef idx="0">
+            <a:schemeClr val="accent1"/>
+          </a:effectRef>
+          <a:fontRef idx="minor">
+            <a:schemeClr val="tx1"/>
+          </a:fontRef>
+        </p:style>
+      </p:cxnSp>
+      <p:cxnSp>
+        <p:nvCxnSpPr>
+          <p:cNvPr id="53" name="Straight Connector 52"/>
+          <p:cNvCxnSpPr/>
+          <p:nvPr/>
+        </p:nvCxnSpPr>
+        <p:spPr>
+          <a:xfrm>
+            <a:off x="3416968" y="1455821"/>
+            <a:ext cx="7446414" cy="0"/>
+          </a:xfrm>
+          <a:prstGeom prst="line">
+            <a:avLst/>
+          </a:prstGeom>
+          <a:ln w="38100"/>
+        </p:spPr>
+        <p:style>
+          <a:lnRef idx="1">
+            <a:schemeClr val="accent1"/>
+          </a:lnRef>
+          <a:fillRef idx="0">
+            <a:schemeClr val="accent1"/>
+          </a:fillRef>
+          <a:effectRef idx="0">
+            <a:schemeClr val="accent1"/>
+          </a:effectRef>
+          <a:fontRef idx="minor">
+            <a:schemeClr val="tx1"/>
+          </a:fontRef>
+        </p:style>
+      </p:cxnSp>
+      <p:sp>
+        <p:nvSpPr>
+          <p:cNvPr id="58" name="TextBox 57"/>
+          <p:cNvSpPr txBox="1"/>
+          <p:nvPr/>
+        </p:nvSpPr>
+        <p:spPr>
+          <a:xfrm>
+            <a:off x="5792925" y="1677865"/>
+            <a:ext cx="1455821" cy="307777"/>
+          </a:xfrm>
+          <a:prstGeom prst="rect">
+            <a:avLst/>
+          </a:prstGeom>
+          <a:noFill/>
+        </p:spPr>
+        <p:txBody>
+          <a:bodyPr wrap="square" rtlCol="0">
+            <a:spAutoFit/>
+          </a:bodyPr>
+          <a:lstStyle/>
+          <a:p>
+            <a:r>
+              <a:rPr lang="en-US" sz="1400" dirty="0" smtClean="0">
+                <a:latin typeface="Poppins" panose="00000500000000000000" pitchFamily="2" charset="0"/>
+                <a:cs typeface="Poppins" panose="00000500000000000000" pitchFamily="2" charset="0"/>
+              </a:rPr>
+              <a:t>Offers</a:t>
+            </a:r>
+            <a:endParaRPr lang="en-US" sz="1400" dirty="0">
+              <a:latin typeface="Poppins" panose="00000500000000000000" pitchFamily="2" charset="0"/>
+              <a:cs typeface="Poppins" panose="00000500000000000000" pitchFamily="2" charset="0"/>
+            </a:endParaRPr>
+          </a:p>
+        </p:txBody>
+      </p:sp>
+      <p:cxnSp>
+        <p:nvCxnSpPr>
+          <p:cNvPr id="59" name="Straight Arrow Connector 58"/>
+          <p:cNvCxnSpPr/>
+          <p:nvPr/>
+        </p:nvCxnSpPr>
+        <p:spPr>
+          <a:xfrm flipV="1">
+            <a:off x="8381244" y="820593"/>
+            <a:ext cx="0" cy="651020"/>
+          </a:xfrm>
+          <a:prstGeom prst="straightConnector1">
+            <a:avLst/>
+          </a:prstGeom>
+          <a:ln w="38100">
+            <a:tailEnd type="triangle"/>
+          </a:ln>
+        </p:spPr>
+        <p:style>
+          <a:lnRef idx="1">
+            <a:schemeClr val="accent1"/>
+          </a:lnRef>
+          <a:fillRef idx="0">
+            <a:schemeClr val="accent1"/>
+          </a:fillRef>
+          <a:effectRef idx="0">
+            <a:schemeClr val="accent1"/>
+          </a:effectRef>
+          <a:fontRef idx="minor">
+            <a:schemeClr val="tx1"/>
+          </a:fontRef>
+        </p:style>
+      </p:cxnSp>
+      <p:grpSp>
+        <p:nvGrpSpPr>
+          <p:cNvPr id="66" name="Group 65"/>
+          <p:cNvGrpSpPr/>
+          <p:nvPr/>
+        </p:nvGrpSpPr>
+        <p:grpSpPr>
+          <a:xfrm>
+            <a:off x="4804152" y="170384"/>
+            <a:ext cx="2189908" cy="675138"/>
+            <a:chOff x="4957010" y="2234977"/>
+            <a:chExt cx="3019927" cy="931029"/>
+          </a:xfrm>
+        </p:grpSpPr>
+        <p:sp>
+          <p:nvSpPr>
+            <p:cNvPr id="67" name="Rounded Rectangle 66"/>
+            <p:cNvSpPr/>
+            <p:nvPr/>
+          </p:nvSpPr>
+          <p:spPr>
+            <a:xfrm>
+              <a:off x="4957010" y="2234977"/>
+              <a:ext cx="3019927" cy="917297"/>
+            </a:xfrm>
+            <a:prstGeom prst="roundRect">
+              <a:avLst>
+                <a:gd name="adj" fmla="val 10953"/>
+              </a:avLst>
+            </a:prstGeom>
+            <a:solidFill>
+              <a:srgbClr val="0070C0"/>
+            </a:solidFill>
+          </p:spPr>
+          <p:style>
+            <a:lnRef idx="2">
+              <a:schemeClr val="accent1">
+                <a:shade val="50000"/>
+              </a:schemeClr>
+            </a:lnRef>
+            <a:fillRef idx="1">
+              <a:schemeClr val="accent1"/>
+            </a:fillRef>
+            <a:effectRef idx="0">
+              <a:schemeClr val="accent1"/>
+            </a:effectRef>
+            <a:fontRef idx="minor">
+              <a:schemeClr val="lt1"/>
+            </a:fontRef>
+          </p:style>
+          <p:txBody>
+            <a:bodyPr rtlCol="0" anchor="ctr"/>
+            <a:lstStyle/>
+            <a:p>
+              <a:pPr algn="ctr"/>
+              <a:endParaRPr lang="en-US"/>
+            </a:p>
+          </p:txBody>
+        </p:sp>
+        <p:sp>
+          <p:nvSpPr>
+            <p:cNvPr id="68" name="TextBox 67"/>
+            <p:cNvSpPr txBox="1"/>
+            <p:nvPr/>
+          </p:nvSpPr>
+          <p:spPr>
+            <a:xfrm>
+              <a:off x="4995552" y="2274702"/>
+              <a:ext cx="2949984" cy="891304"/>
+            </a:xfrm>
+            <a:prstGeom prst="rect">
+              <a:avLst/>
+            </a:prstGeom>
+            <a:noFill/>
+          </p:spPr>
+          <p:txBody>
+            <a:bodyPr wrap="square" rtlCol="0">
+              <a:spAutoFit/>
+            </a:bodyPr>
+            <a:lstStyle/>
+            <a:p>
+              <a:pPr algn="ctr"/>
+              <a:r>
+                <a:rPr lang="en-US" sz="1200" dirty="0" smtClean="0">
+                  <a:solidFill>
+                    <a:schemeClr val="bg1"/>
+                  </a:solidFill>
+                  <a:latin typeface="Poppins" panose="00000500000000000000" pitchFamily="2" charset="0"/>
+                  <a:cs typeface="Poppins" panose="00000500000000000000" pitchFamily="2" charset="0"/>
+                </a:rPr>
+                <a:t>Can post pictures and videos of their pets through profiles</a:t>
+              </a:r>
+              <a:endParaRPr lang="en-US" sz="1200" dirty="0">
+                <a:solidFill>
+                  <a:schemeClr val="bg1"/>
+                </a:solidFill>
+                <a:latin typeface="Poppins" panose="00000500000000000000" pitchFamily="2" charset="0"/>
+                <a:cs typeface="Poppins" panose="00000500000000000000" pitchFamily="2" charset="0"/>
+              </a:endParaRPr>
+            </a:p>
+          </p:txBody>
+        </p:sp>
+      </p:grpSp>
+      <p:cxnSp>
+        <p:nvCxnSpPr>
+          <p:cNvPr id="69" name="Straight Arrow Connector 68"/>
+          <p:cNvCxnSpPr/>
+          <p:nvPr/>
+        </p:nvCxnSpPr>
+        <p:spPr>
+          <a:xfrm flipH="1" flipV="1">
+            <a:off x="5802450" y="835564"/>
+            <a:ext cx="6871" cy="620257"/>
+          </a:xfrm>
+          <a:prstGeom prst="straightConnector1">
+            <a:avLst/>
+          </a:prstGeom>
+          <a:ln w="38100">
+            <a:tailEnd type="triangle"/>
+          </a:ln>
+        </p:spPr>
+        <p:style>
+          <a:lnRef idx="1">
+            <a:schemeClr val="accent1"/>
+          </a:lnRef>
+          <a:fillRef idx="0">
+            <a:schemeClr val="accent1"/>
+          </a:fillRef>
+          <a:effectRef idx="0">
+            <a:schemeClr val="accent1"/>
+          </a:effectRef>
+          <a:fontRef idx="minor">
+            <a:schemeClr val="tx1"/>
+          </a:fontRef>
+        </p:style>
+      </p:cxnSp>
+      <p:cxnSp>
+        <p:nvCxnSpPr>
+          <p:cNvPr id="70" name="Straight Arrow Connector 69"/>
+          <p:cNvCxnSpPr/>
+          <p:nvPr/>
+        </p:nvCxnSpPr>
+        <p:spPr>
+          <a:xfrm flipV="1">
+            <a:off x="3413532" y="804801"/>
+            <a:ext cx="0" cy="651020"/>
+          </a:xfrm>
+          <a:prstGeom prst="straightConnector1">
+            <a:avLst/>
+          </a:prstGeom>
+          <a:ln w="38100">
+            <a:tailEnd type="triangle"/>
+          </a:ln>
+        </p:spPr>
+        <p:style>
+          <a:lnRef idx="1">
+            <a:schemeClr val="accent1"/>
+          </a:lnRef>
+          <a:fillRef idx="0">
+            <a:schemeClr val="accent1"/>
+          </a:fillRef>
+          <a:effectRef idx="0">
+            <a:schemeClr val="accent1"/>
+          </a:effectRef>
+          <a:fontRef idx="minor">
+            <a:schemeClr val="tx1"/>
+          </a:fontRef>
+        </p:style>
+      </p:cxnSp>
+      <p:grpSp>
+        <p:nvGrpSpPr>
+          <p:cNvPr id="71" name="Group 70"/>
+          <p:cNvGrpSpPr/>
+          <p:nvPr/>
+        </p:nvGrpSpPr>
+        <p:grpSpPr>
+          <a:xfrm>
+            <a:off x="2390718" y="157794"/>
+            <a:ext cx="2189908" cy="665180"/>
+            <a:chOff x="4957010" y="2234977"/>
+            <a:chExt cx="3019927" cy="917297"/>
+          </a:xfrm>
+        </p:grpSpPr>
+        <p:sp>
+          <p:nvSpPr>
+            <p:cNvPr id="72" name="Rounded Rectangle 71"/>
+            <p:cNvSpPr/>
+            <p:nvPr/>
+          </p:nvSpPr>
+          <p:spPr>
+            <a:xfrm>
+              <a:off x="4957010" y="2234977"/>
+              <a:ext cx="3019927" cy="917297"/>
+            </a:xfrm>
+            <a:prstGeom prst="roundRect">
+              <a:avLst>
+                <a:gd name="adj" fmla="val 10953"/>
+              </a:avLst>
+            </a:prstGeom>
+            <a:solidFill>
+              <a:srgbClr val="0070C0"/>
+            </a:solidFill>
+          </p:spPr>
+          <p:style>
+            <a:lnRef idx="2">
+              <a:schemeClr val="accent1">
+                <a:shade val="50000"/>
+              </a:schemeClr>
+            </a:lnRef>
+            <a:fillRef idx="1">
+              <a:schemeClr val="accent1"/>
+            </a:fillRef>
+            <a:effectRef idx="0">
+              <a:schemeClr val="accent1"/>
+            </a:effectRef>
+            <a:fontRef idx="minor">
+              <a:schemeClr val="lt1"/>
+            </a:fontRef>
+          </p:style>
+          <p:txBody>
+            <a:bodyPr rtlCol="0" anchor="ctr"/>
+            <a:lstStyle/>
+            <a:p>
+              <a:pPr algn="ctr"/>
+              <a:endParaRPr lang="en-US"/>
+            </a:p>
+          </p:txBody>
+        </p:sp>
+        <p:sp>
+          <p:nvSpPr>
+            <p:cNvPr id="73" name="TextBox 72"/>
+            <p:cNvSpPr txBox="1"/>
+            <p:nvPr/>
+          </p:nvSpPr>
+          <p:spPr>
+            <a:xfrm>
+              <a:off x="4995552" y="2390849"/>
+              <a:ext cx="2949984" cy="636646"/>
+            </a:xfrm>
+            <a:prstGeom prst="rect">
+              <a:avLst/>
+            </a:prstGeom>
+            <a:noFill/>
+          </p:spPr>
+          <p:txBody>
+            <a:bodyPr wrap="square" rtlCol="0">
+              <a:spAutoFit/>
+            </a:bodyPr>
+            <a:lstStyle/>
+            <a:p>
+              <a:pPr algn="ctr"/>
+              <a:r>
+                <a:rPr lang="en-US" sz="1200" dirty="0" smtClean="0">
+                  <a:solidFill>
+                    <a:schemeClr val="bg1"/>
+                  </a:solidFill>
+                  <a:latin typeface="Poppins" panose="00000500000000000000" pitchFamily="2" charset="0"/>
+                  <a:cs typeface="Poppins" panose="00000500000000000000" pitchFamily="2" charset="0"/>
+                </a:rPr>
+                <a:t>Make communities (Groups)</a:t>
+              </a:r>
+              <a:endParaRPr lang="en-US" sz="1200" dirty="0">
+                <a:solidFill>
+                  <a:schemeClr val="bg1"/>
+                </a:solidFill>
+                <a:latin typeface="Poppins" panose="00000500000000000000" pitchFamily="2" charset="0"/>
+                <a:cs typeface="Poppins" panose="00000500000000000000" pitchFamily="2" charset="0"/>
+              </a:endParaRPr>
+            </a:p>
+          </p:txBody>
+        </p:sp>
+      </p:grpSp>
+      <p:grpSp>
+        <p:nvGrpSpPr>
+          <p:cNvPr id="74" name="Group 73"/>
+          <p:cNvGrpSpPr/>
+          <p:nvPr/>
+        </p:nvGrpSpPr>
+        <p:grpSpPr>
+          <a:xfrm>
+            <a:off x="9768429" y="189766"/>
+            <a:ext cx="2189908" cy="665180"/>
+            <a:chOff x="4957010" y="2234977"/>
+            <a:chExt cx="3019927" cy="917297"/>
+          </a:xfrm>
+        </p:grpSpPr>
+        <p:sp>
+          <p:nvSpPr>
+            <p:cNvPr id="75" name="Rounded Rectangle 74"/>
+            <p:cNvSpPr/>
+            <p:nvPr/>
+          </p:nvSpPr>
+          <p:spPr>
+            <a:xfrm>
+              <a:off x="4957010" y="2234977"/>
+              <a:ext cx="3019927" cy="917297"/>
+            </a:xfrm>
+            <a:prstGeom prst="roundRect">
+              <a:avLst>
+                <a:gd name="adj" fmla="val 10953"/>
+              </a:avLst>
+            </a:prstGeom>
+            <a:solidFill>
+              <a:srgbClr val="0070C0"/>
+            </a:solidFill>
+          </p:spPr>
+          <p:style>
+            <a:lnRef idx="2">
+              <a:schemeClr val="accent1">
+                <a:shade val="50000"/>
+              </a:schemeClr>
+            </a:lnRef>
+            <a:fillRef idx="1">
+              <a:schemeClr val="accent1"/>
+            </a:fillRef>
+            <a:effectRef idx="0">
+              <a:schemeClr val="accent1"/>
+            </a:effectRef>
+            <a:fontRef idx="minor">
+              <a:schemeClr val="lt1"/>
+            </a:fontRef>
+          </p:style>
+          <p:txBody>
+            <a:bodyPr rtlCol="0" anchor="ctr"/>
+            <a:lstStyle/>
+            <a:p>
+              <a:pPr algn="ctr"/>
+              <a:endParaRPr lang="en-US"/>
+            </a:p>
+          </p:txBody>
+        </p:sp>
+        <p:sp>
+          <p:nvSpPr>
+            <p:cNvPr id="76" name="TextBox 75"/>
+            <p:cNvSpPr txBox="1"/>
+            <p:nvPr/>
+          </p:nvSpPr>
+          <p:spPr>
+            <a:xfrm>
+              <a:off x="4991981" y="2510336"/>
+              <a:ext cx="2949984" cy="381987"/>
+            </a:xfrm>
+            <a:prstGeom prst="rect">
+              <a:avLst/>
+            </a:prstGeom>
+            <a:noFill/>
+          </p:spPr>
+          <p:txBody>
+            <a:bodyPr wrap="square" rtlCol="0">
+              <a:spAutoFit/>
+            </a:bodyPr>
+            <a:lstStyle/>
+            <a:p>
+              <a:pPr algn="ctr"/>
+              <a:r>
+                <a:rPr lang="en-US" sz="1200" dirty="0" smtClean="0">
+                  <a:solidFill>
+                    <a:schemeClr val="bg1"/>
+                  </a:solidFill>
+                  <a:latin typeface="Poppins" panose="00000500000000000000" pitchFamily="2" charset="0"/>
+                  <a:cs typeface="Poppins" panose="00000500000000000000" pitchFamily="2" charset="0"/>
+                </a:rPr>
+                <a:t>Forums</a:t>
+              </a:r>
+              <a:endParaRPr lang="en-US" sz="1200" dirty="0">
+                <a:solidFill>
+                  <a:schemeClr val="bg1"/>
+                </a:solidFill>
+                <a:latin typeface="Poppins" panose="00000500000000000000" pitchFamily="2" charset="0"/>
+                <a:cs typeface="Poppins" panose="00000500000000000000" pitchFamily="2" charset="0"/>
+              </a:endParaRPr>
+            </a:p>
+          </p:txBody>
+        </p:sp>
+      </p:grpSp>
+      <p:cxnSp>
+        <p:nvCxnSpPr>
+          <p:cNvPr id="78" name="Straight Arrow Connector 77"/>
+          <p:cNvCxnSpPr/>
+          <p:nvPr/>
+        </p:nvCxnSpPr>
+        <p:spPr>
+          <a:xfrm flipV="1">
+            <a:off x="10863382" y="854946"/>
+            <a:ext cx="0" cy="619048"/>
+          </a:xfrm>
+          <a:prstGeom prst="straightConnector1">
+            <a:avLst/>
+          </a:prstGeom>
+          <a:ln w="38100">
+            <a:tailEnd type="triangle"/>
+          </a:ln>
+        </p:spPr>
+        <p:style>
+          <a:lnRef idx="1">
+            <a:schemeClr val="accent1"/>
+          </a:lnRef>
+          <a:fillRef idx="0">
+            <a:schemeClr val="accent1"/>
+          </a:fillRef>
+          <a:effectRef idx="0">
+            <a:schemeClr val="accent1"/>
+          </a:effectRef>
+          <a:fontRef idx="minor">
+            <a:schemeClr val="tx1"/>
+          </a:fontRef>
+        </p:style>
+      </p:cxnSp>
+      <p:cxnSp>
+        <p:nvCxnSpPr>
+          <p:cNvPr id="80" name="Straight Arrow Connector 79"/>
+          <p:cNvCxnSpPr/>
+          <p:nvPr/>
+        </p:nvCxnSpPr>
+        <p:spPr>
+          <a:xfrm flipH="1" flipV="1">
+            <a:off x="11201400" y="854946"/>
+            <a:ext cx="37619" cy="3913319"/>
+          </a:xfrm>
+          <a:prstGeom prst="straightConnector1">
+            <a:avLst/>
+          </a:prstGeom>
+          <a:ln w="38100">
+            <a:tailEnd type="triangle"/>
+          </a:ln>
+        </p:spPr>
+        <p:style>
+          <a:lnRef idx="1">
+            <a:schemeClr val="accent1"/>
+          </a:lnRef>
+          <a:fillRef idx="0">
+            <a:schemeClr val="accent1"/>
+          </a:fillRef>
+          <a:effectRef idx="0">
+            <a:schemeClr val="accent1"/>
+          </a:effectRef>
+          <a:fontRef idx="minor">
+            <a:schemeClr val="tx1"/>
+          </a:fontRef>
+        </p:style>
+      </p:cxnSp>
+      <p:sp>
+        <p:nvSpPr>
+          <p:cNvPr id="84" name="TextBox 83"/>
+          <p:cNvSpPr txBox="1"/>
+          <p:nvPr/>
+        </p:nvSpPr>
+        <p:spPr>
+          <a:xfrm>
+            <a:off x="10006708" y="2416692"/>
+            <a:ext cx="1455821" cy="307777"/>
+          </a:xfrm>
+          <a:prstGeom prst="rect">
+            <a:avLst/>
+          </a:prstGeom>
+          <a:noFill/>
+        </p:spPr>
+        <p:txBody>
+          <a:bodyPr wrap="square" rtlCol="0">
+            <a:spAutoFit/>
+          </a:bodyPr>
+          <a:lstStyle/>
+          <a:p>
+            <a:r>
+              <a:rPr lang="en-US" sz="1400" dirty="0" smtClean="0">
+                <a:latin typeface="Poppins" panose="00000500000000000000" pitchFamily="2" charset="0"/>
+                <a:cs typeface="Poppins" panose="00000500000000000000" pitchFamily="2" charset="0"/>
+              </a:rPr>
+              <a:t>Contributes</a:t>
+            </a:r>
+            <a:endParaRPr lang="en-US" sz="1400" dirty="0">
+              <a:latin typeface="Poppins" panose="00000500000000000000" pitchFamily="2" charset="0"/>
+              <a:cs typeface="Poppins" panose="00000500000000000000" pitchFamily="2" charset="0"/>
+            </a:endParaRPr>
+          </a:p>
+        </p:txBody>
+      </p:sp>
+      <p:cxnSp>
+        <p:nvCxnSpPr>
+          <p:cNvPr id="86" name="Straight Connector 85"/>
+          <p:cNvCxnSpPr/>
+          <p:nvPr/>
+        </p:nvCxnSpPr>
+        <p:spPr>
+          <a:xfrm flipH="1">
+            <a:off x="8264449" y="2662238"/>
+            <a:ext cx="6093" cy="2849881"/>
+          </a:xfrm>
+          <a:prstGeom prst="line">
+            <a:avLst/>
+          </a:prstGeom>
+          <a:ln w="38100"/>
+        </p:spPr>
+        <p:style>
+          <a:lnRef idx="1">
+            <a:schemeClr val="accent1"/>
+          </a:lnRef>
+          <a:fillRef idx="0">
+            <a:schemeClr val="accent1"/>
+          </a:fillRef>
+          <a:effectRef idx="0">
+            <a:schemeClr val="accent1"/>
+          </a:effectRef>
+          <a:fontRef idx="minor">
+            <a:schemeClr val="tx1"/>
+          </a:fontRef>
+        </p:style>
+      </p:cxnSp>
+      <p:cxnSp>
+        <p:nvCxnSpPr>
+          <p:cNvPr id="88" name="Straight Connector 87"/>
+          <p:cNvCxnSpPr>
+            <a:endCxn id="11" idx="3"/>
+          </p:cNvCxnSpPr>
+          <p:nvPr/>
+        </p:nvCxnSpPr>
+        <p:spPr>
+          <a:xfrm flipH="1" flipV="1">
+            <a:off x="6996939" y="2682038"/>
+            <a:ext cx="1294574" cy="6548"/>
+          </a:xfrm>
+          <a:prstGeom prst="line">
+            <a:avLst/>
+          </a:prstGeom>
+          <a:ln w="38100"/>
+        </p:spPr>
+        <p:style>
+          <a:lnRef idx="1">
+            <a:schemeClr val="accent1"/>
+          </a:lnRef>
+          <a:fillRef idx="0">
+            <a:schemeClr val="accent1"/>
+          </a:fillRef>
+          <a:effectRef idx="0">
+            <a:schemeClr val="accent1"/>
+          </a:effectRef>
+          <a:fontRef idx="minor">
+            <a:schemeClr val="tx1"/>
+          </a:fontRef>
+        </p:style>
+      </p:cxnSp>
     </p:spTree>
     <p:extLst>
       <p:ext uri="{BB962C8B-B14F-4D97-AF65-F5344CB8AC3E}">
